--- a/Internationalbreweries Power-BI-Storytelling.pptx
+++ b/Internationalbreweries Power-BI-Storytelling.pptx
@@ -264,7 +264,7 @@
           <a:p>
             <a:fld id="{37A2730A-859E-B540-ADF3-E97069AD1FDB}" type="datetimeFigureOut">
               <a:rPr lang="en-US" smtClean="0"/>
-              <a:t>3/7/2025</a:t>
+              <a:t>3/31/2025</a:t>
             </a:fld>
             <a:endParaRPr lang="en-US"/>
           </a:p>
@@ -462,7 +462,7 @@
           <a:p>
             <a:fld id="{37A2730A-859E-B540-ADF3-E97069AD1FDB}" type="datetimeFigureOut">
               <a:rPr lang="en-US" smtClean="0"/>
-              <a:t>3/7/2025</a:t>
+              <a:t>3/31/2025</a:t>
             </a:fld>
             <a:endParaRPr lang="en-US"/>
           </a:p>
@@ -670,7 +670,7 @@
           <a:p>
             <a:fld id="{37A2730A-859E-B540-ADF3-E97069AD1FDB}" type="datetimeFigureOut">
               <a:rPr lang="en-US" smtClean="0"/>
-              <a:t>3/7/2025</a:t>
+              <a:t>3/31/2025</a:t>
             </a:fld>
             <a:endParaRPr lang="en-US"/>
           </a:p>
@@ -868,7 +868,7 @@
           <a:p>
             <a:fld id="{37A2730A-859E-B540-ADF3-E97069AD1FDB}" type="datetimeFigureOut">
               <a:rPr lang="en-US" smtClean="0"/>
-              <a:t>3/7/2025</a:t>
+              <a:t>3/31/2025</a:t>
             </a:fld>
             <a:endParaRPr lang="en-US"/>
           </a:p>
@@ -1143,7 +1143,7 @@
           <a:p>
             <a:fld id="{37A2730A-859E-B540-ADF3-E97069AD1FDB}" type="datetimeFigureOut">
               <a:rPr lang="en-US" smtClean="0"/>
-              <a:t>3/7/2025</a:t>
+              <a:t>3/31/2025</a:t>
             </a:fld>
             <a:endParaRPr lang="en-US"/>
           </a:p>
@@ -1408,7 +1408,7 @@
           <a:p>
             <a:fld id="{37A2730A-859E-B540-ADF3-E97069AD1FDB}" type="datetimeFigureOut">
               <a:rPr lang="en-US" smtClean="0"/>
-              <a:t>3/7/2025</a:t>
+              <a:t>3/31/2025</a:t>
             </a:fld>
             <a:endParaRPr lang="en-US"/>
           </a:p>
@@ -1820,7 +1820,7 @@
           <a:p>
             <a:fld id="{37A2730A-859E-B540-ADF3-E97069AD1FDB}" type="datetimeFigureOut">
               <a:rPr lang="en-US" smtClean="0"/>
-              <a:t>3/7/2025</a:t>
+              <a:t>3/31/2025</a:t>
             </a:fld>
             <a:endParaRPr lang="en-US"/>
           </a:p>
@@ -1961,7 +1961,7 @@
           <a:p>
             <a:fld id="{37A2730A-859E-B540-ADF3-E97069AD1FDB}" type="datetimeFigureOut">
               <a:rPr lang="en-US" smtClean="0"/>
-              <a:t>3/7/2025</a:t>
+              <a:t>3/31/2025</a:t>
             </a:fld>
             <a:endParaRPr lang="en-US"/>
           </a:p>
@@ -2074,7 +2074,7 @@
           <a:p>
             <a:fld id="{37A2730A-859E-B540-ADF3-E97069AD1FDB}" type="datetimeFigureOut">
               <a:rPr lang="en-US" smtClean="0"/>
-              <a:t>3/7/2025</a:t>
+              <a:t>3/31/2025</a:t>
             </a:fld>
             <a:endParaRPr lang="en-US"/>
           </a:p>
@@ -2385,7 +2385,7 @@
           <a:p>
             <a:fld id="{37A2730A-859E-B540-ADF3-E97069AD1FDB}" type="datetimeFigureOut">
               <a:rPr lang="en-US" smtClean="0"/>
-              <a:t>3/7/2025</a:t>
+              <a:t>3/31/2025</a:t>
             </a:fld>
             <a:endParaRPr lang="en-US"/>
           </a:p>
@@ -2673,7 +2673,7 @@
           <a:p>
             <a:fld id="{37A2730A-859E-B540-ADF3-E97069AD1FDB}" type="datetimeFigureOut">
               <a:rPr lang="en-US" smtClean="0"/>
-              <a:t>3/7/2025</a:t>
+              <a:t>3/31/2025</a:t>
             </a:fld>
             <a:endParaRPr lang="en-US"/>
           </a:p>
@@ -2917,7 +2917,7 @@
           <a:p>
             <a:fld id="{37A2730A-859E-B540-ADF3-E97069AD1FDB}" type="datetimeFigureOut">
               <a:rPr lang="en-US" smtClean="0"/>
-              <a:t>3/7/2025</a:t>
+              <a:t>3/31/2025</a:t>
             </a:fld>
             <a:endParaRPr lang="en-US"/>
           </a:p>
@@ -3627,10 +3627,10 @@
         <mc:Choice xmlns:we="http://schemas.microsoft.com/office/webextensions/webextension/2010/11" xmlns:pca="http://schemas.microsoft.com/office/powerpoint/2013/contentapp" Requires="we pca">
           <p:graphicFrame>
             <p:nvGraphicFramePr>
-              <p:cNvPr id="3" name="Add-in" descr="Add-in content for Microsoft Power BI.">
+              <p:cNvPr id="7" name="Add-in" descr="Add-in content for Microsoft Power BI.">
                 <a:extLst>
                   <a:ext uri="{FF2B5EF4-FFF2-40B4-BE49-F238E27FC236}">
-                    <a16:creationId xmlns:a16="http://schemas.microsoft.com/office/drawing/2014/main" id="{716EBB4C-122F-DE52-A257-14C5813A4EE5}"/>
+                    <a16:creationId xmlns:a16="http://schemas.microsoft.com/office/drawing/2014/main" id="{D16CB641-118A-0758-DE1A-3C30657AB3A3}"/>
                   </a:ext>
                 </a:extLst>
               </p:cNvPr>
@@ -3640,14 +3640,14 @@
               <p:nvPr>
                 <p:extLst>
                   <p:ext uri="{D42A27DB-BD31-4B8C-83A1-F6EECF244321}">
-                    <p14:modId xmlns:p14="http://schemas.microsoft.com/office/powerpoint/2010/main" val="939603982"/>
+                    <p14:modId xmlns:p14="http://schemas.microsoft.com/office/powerpoint/2010/main" val="3274702738"/>
                   </p:ext>
                 </p:extLst>
               </p:nvPr>
             </p:nvGraphicFramePr>
             <p:xfrm>
-              <a:off x="569167" y="476517"/>
-              <a:ext cx="10749976" cy="5335725"/>
+              <a:off x="186612" y="399523"/>
+              <a:ext cx="11849878" cy="5750824"/>
             </p:xfrm>
             <a:graphic>
               <a:graphicData uri="http://schemas.microsoft.com/office/webextensions/webextension/2010/11">
@@ -3659,10 +3659,10 @@
         <mc:Fallback>
           <p:pic>
             <p:nvPicPr>
-              <p:cNvPr id="3" name="Add-in" descr="Add-in content for Microsoft Power BI.">
+              <p:cNvPr id="7" name="Add-in" descr="Add-in content for Microsoft Power BI.">
                 <a:extLst>
                   <a:ext uri="{FF2B5EF4-FFF2-40B4-BE49-F238E27FC236}">
-                    <a16:creationId xmlns:a16="http://schemas.microsoft.com/office/drawing/2014/main" id="{716EBB4C-122F-DE52-A257-14C5813A4EE5}"/>
+                    <a16:creationId xmlns:a16="http://schemas.microsoft.com/office/drawing/2014/main" id="{D16CB641-118A-0758-DE1A-3C30657AB3A3}"/>
                   </a:ext>
                 </a:extLst>
               </p:cNvPr>
@@ -3679,8 +3679,8 @@
             </p:blipFill>
             <p:spPr>
               <a:xfrm>
-                <a:off x="569167" y="476517"/>
-                <a:ext cx="10749976" cy="5335725"/>
+                <a:off x="186612" y="399523"/>
+                <a:ext cx="11849878" cy="5750824"/>
               </a:xfrm>
               <a:prstGeom prst="rect">
                 <a:avLst/>
@@ -4045,14 +4045,14 @@
               <p:nvPr>
                 <p:extLst>
                   <p:ext uri="{D42A27DB-BD31-4B8C-83A1-F6EECF244321}">
-                    <p14:modId xmlns:p14="http://schemas.microsoft.com/office/powerpoint/2010/main" val="3661661614"/>
+                    <p14:modId xmlns:p14="http://schemas.microsoft.com/office/powerpoint/2010/main" val="1916749336"/>
                   </p:ext>
                 </p:extLst>
               </p:nvPr>
             </p:nvGraphicFramePr>
             <p:xfrm>
-              <a:off x="569167" y="587218"/>
-              <a:ext cx="10901821" cy="5335725"/>
+              <a:off x="298580" y="587218"/>
+              <a:ext cx="11523305" cy="5335725"/>
             </p:xfrm>
             <a:graphic>
               <a:graphicData uri="http://schemas.microsoft.com/office/webextensions/webextension/2010/11">
@@ -4084,8 +4084,8 @@
             </p:blipFill>
             <p:spPr>
               <a:xfrm>
-                <a:off x="569167" y="587218"/>
-                <a:ext cx="10901821" cy="5335725"/>
+                <a:off x="298580" y="587218"/>
+                <a:ext cx="11523305" cy="5335725"/>
               </a:xfrm>
               <a:prstGeom prst="rect">
                 <a:avLst/>
@@ -4378,14 +4378,14 @@
               <p:nvPr>
                 <p:extLst>
                   <p:ext uri="{D42A27DB-BD31-4B8C-83A1-F6EECF244321}">
-                    <p14:modId xmlns:p14="http://schemas.microsoft.com/office/powerpoint/2010/main" val="1528006197"/>
+                    <p14:modId xmlns:p14="http://schemas.microsoft.com/office/powerpoint/2010/main" val="4236660355"/>
                   </p:ext>
                 </p:extLst>
               </p:nvPr>
             </p:nvGraphicFramePr>
             <p:xfrm>
-              <a:off x="652032" y="637929"/>
-              <a:ext cx="10749976" cy="5335725"/>
+              <a:off x="354563" y="637929"/>
+              <a:ext cx="11448661" cy="5335725"/>
             </p:xfrm>
             <a:graphic>
               <a:graphicData uri="http://schemas.microsoft.com/office/webextensions/webextension/2010/11">
@@ -4417,8 +4417,8 @@
             </p:blipFill>
             <p:spPr>
               <a:xfrm>
-                <a:off x="652032" y="637929"/>
-                <a:ext cx="10749976" cy="5335725"/>
+                <a:off x="354563" y="637929"/>
+                <a:ext cx="11448661" cy="5335725"/>
               </a:xfrm>
               <a:prstGeom prst="rect">
                 <a:avLst/>
@@ -4750,29 +4750,28 @@
 </file>
 
 <file path=ppt/webextensions/webextension1.xml><?xml version="1.0" encoding="utf-8"?>
-<we:webextension xmlns:we="http://schemas.microsoft.com/office/webextensions/webextension/2010/11" id="{542A2A72-FD51-4116-9A79-4D5507F0B11A}">
+<we:webextension xmlns:we="http://schemas.microsoft.com/office/webextensions/webextension/2010/11" id="{91849E72-A47E-4AAB-9D1A-E5D4CCE93801}">
   <we:reference id="WA200003233" version="2.0.0.3" store="en-US" storeType="OMEX"/>
   <we:alternateReferences/>
   <we:properties>
     <we:property name="Microsoft.Office.CampaignId" value="&quot;none&quot;"/>
     <we:property name="artifactViewState" value="&quot;live&quot;"/>
     <we:property name="backgroundColor" value="&quot;#FFFFFF&quot;"/>
-    <we:property name="bookmark" value="&quot;H4sIAAAAAAAAA+1a32/bNhD+Vwa99MUYJFKipLw5jjsE6BLPzooVRRDwx9FRK0sGRSdxA//vO1FOFqd22nhxZrV7C8nT8e6+j3fkObeeyqppzucnfALegXdYlp8n3Hz+JfA6XtHMJUGUJJKD1rEiQnMVg8LVcmqzsqi8g1vPcjMG+z6rZjyvFeHkx/OOx/N8wMf1SPO8go43BVOVBc+zL9AI45I1M1h0PLiZ5qXhtcqR5RZqtVcojmM0IfiV4o5c2uwKRiBtM6sVC4TP0LTIVxGEACJBsaoRcJatFalVu+17ZWF5VuA2TjZMFEt5qJKYqCT1Yyq5m89yuxQR8/7N1KB36PN8Wgenq654IV1A0AUDVWPxrdcdjw2MuV0O+yuLvTKfTdbMj8qZkTAE7ZYKm9k57nFc4P6FU8XzQwPXYDKM6gLDNjAlBtVJ/Y7OXF6U+sJewsUcuHECb2fFMlykHl6W1z0DGF/lHfiLc5ypsmKcL+H4JzJnjXeSGwe1+IQxrSOAH5RGgTmcuyAcZeYODdJ55Ms+BgA9xikigMeSslQGvl/TOklFi4AeDE/fHp89cs7/Gt3Ove09nBqXJpMI8WPzd2Hh4bB7cjTytiDcNUoazBZ575Ib2xrqbYJkcX6XtVD404O8tESkcWWnECDjcSUOIh4IHSrNQyo1IyyktdYnwcgmmL1XMah1yZTIgEcQQMqigKcgSfRNXRZurChvvtaWCtSHdkUgKUnxZIba/+ZhfG1CD/u/HZ+ebEPoKs8kmBW3vQlguaz/UNxy59a02areuV4vlVsG5/Wt9y5DGxvd73k+q9W+OcIvVHldvEGj7vLaWqa5L6qd8ew+Mg3Pkoj7GgIhw0hSIRVEcdii1PrHn92Ts+OzD89Jrhut34WBH/rd4VaJVZXFzLYrqW4G479Lq3fxX7Ld9xMqgIZhQhihEd4x/8VF4vXuRM+m8t4U1GfzPsfrfbtov393iXUkag5AJBKREEV8AolIfcGEv3/Fe/vb6I9evB9dElkIfhoTChSkpopTJZMWFe9R911/dDHsD362h+8TjjfcEjRgVCYpCaKEqTgN0zhuEbAPDvBPhOomrxtIMeu6Nx1eOVjKuGCKsRZB+mL1vVWQbi7t9ZQmOqRUpUFMOaRaE+G3qS31/W+nHwvUp54p7qSGgiaSR9InvmQ69UNJWgTr87uNr/rAWYn+/r9reqejl8h6leQWt1v7sFl7kfzLkWtvyINPmZ2/Wh4w43zZaaS+FCFhsdYQMRFTEW1/EF+zu7OPTH65Cu6M+/+N/pKNKYH1JtCaxRGVSkUyRta3qOZs04ZtT1ehpb9x7WM7dqWB4Zi/rlNTzmw15RIGvIA1HRvkCi9UDd6TXZv6HxXu+zWLxd9LDWqXOiEAAA==&quot;"/>
-    <we:property name="creatorSessionId" value="&quot;53432a80-91a1-4750-a0ce-675274b83758&quot;"/>
+    <we:property name="bookmark" value="&quot;H4sIAAAAAAAAA+1Z32/bOAz+Vw5+2UswyJIt23tL0+xQYGt7STfccCgK/aBSb44dyErbrOj/PlpObu2aNr1ds4tvezRFUyS/jzQlXwc6r2eFWByKKQSvgr2q+jQV9tNvYdALylZmDOUhZ5yTMORRwglnAlermcursg5eXQdO2Am493k9F0VjCIV/nfYCURTHYtI8GVHU0AtmYOuqFEX+GVplXHJ2Dje9AK5mRWVFY3LshIPG7AWq4zO6EL5kuKNQLr+AMSjXSo3moSRcCYiJjiECkCmq1a2C92ytSmPabz+oSifyErdpZFKJODSGJzFTWscqiSj3NvLCrVQWw6uZxegw5sWsSU5fX4hSgQ58CBbq1uProD+ZWJgIt3wc3lkcVMV8ukY+ruZWwQiMXypd7ha4x0GJ+5felCj2LFyCzTGrN5i2Y1thUr3WH+/6hycHJx+8/PW8XGaJNI/n1eXAAqZVN4Le394PUDSpbK5EcS+Abfi4N+of7o+D+y6doqTOy0mxJMZXjE5aTy9R0yKNisG5sK6hn/yIODeo4KuV1WD3Fh6Y/dyuGEJ73/i+Q6DcnK4Ijeofb1F2iUkbzFZBOL1pVjLJiJLI9cQYiLlMmIy/n/bbcPjDsD9aR5reDlbh8ejo9cHJ5hrcSHjlnesW2x8K/r/j+oo6LdXTSLIUu7wilChuMhIp2qEO/1RuPaEutt7rdr9SB0fj56jTWgmH260t1LWc/9OTa2fIg6W59Sq8xYy2EA01EWM6CxMmIMMBUxLZoUJ8+qi1uc0LqzvT3x+bZnx/pToJYxHirM0zLiTXvEsT9PN9u7sE6sMf7UYkGR79VJrRME65TrIoS5IOQXrrwPE1OPp/h/ShqFtIeQQkSygDBsowLZhWaYcgHfffDMdno+Hxz4bqI4G3wMYyldiCKaGQyoxILgnZCGx3rgDqIldg78AVTMFO/F2RFk74sGbtVs3OzXql/TL4qK+DNzn62Np+L4p5Y/bFPr6hq8vyBTq1SuXayc2/Uf+4c7nKaKRNDIrRTIKIzO6hORr+fnB0+AvNRzLToolYqlDEEELG41BkoKi/ZXk0Rw6unKyu7naoxpqfsqRBdoiIKcMpj9hGa/lUYHbv2aJIrUQxnqmQEDAmSbMuzeL//FDcnY7X0UvP3bsG+qa1mijFA4qIdJpQnWYkYUp0iPJvq9Kdn1XmzJ3D2QKE/dkmoSckYHkgJSRlElgUpZRTFuPB9F/0th8Xyu7fnj3bWbnIS/jV3p6fRMsb71gQA6FUUayYVBriJOpQp/uef5o78WtqI+11Vc5dt3i/i/8yb//f8YS/M9x+AevAOuLeIAAA&quot;"/>
+    <we:property name="creatorSessionId" value="&quot;fec1d43a-9126-422b-8d73-f7d30878412c&quot;"/>
     <we:property name="creatorTenantId" value="&quot;bd697c1b-c481-479c-841e-c618542675c3&quot;"/>
     <we:property name="creatorUserId" value="&quot;10032003E0B78333&quot;"/>
-    <we:property name="datasetId" value="&quot;e45200a1-02cd-4925-9b6d-27cb5a7ef4b2&quot;"/>
-    <we:property name="embedUrl" value="&quot;/reportEmbed?reportId=5abd6940-4195-4c01-bea5-18c9d38016a8&amp;config=eyJjbHVzdGVyVXJsIjoiaHR0cHM6Ly9XQUJJLVVTLUVBU1QyLUMtUFJJTUFSWS1yZWRpcmVjdC5hbmFseXNpcy53aW5kb3dzLm5ldCIsImVtYmVkRmVhdHVyZXMiOnsidXNhZ2VNZXRyaWNzVk5leHQiOnRydWV9fQ%3D%3D&amp;disableSensitivityBanner=true&quot;"/>
+    <we:property name="datasetId" value="&quot;b198c181-452f-4c4d-8715-031513d57bc1&quot;"/>
+    <we:property name="embedUrl" value="&quot;/reportEmbed?reportId=5c97d12c-be94-4c8f-908f-fee5fa6ed713&amp;config=eyJjbHVzdGVyVXJsIjoiaHR0cHM6Ly9XQUJJLVVTLUVBU1QyLUMtUFJJTUFSWS1yZWRpcmVjdC5hbmFseXNpcy53aW5kb3dzLm5ldCIsImVtYmVkRmVhdHVyZXMiOnsidXNhZ2VNZXRyaWNzVk5leHQiOnRydWV9fQ%3D%3D&amp;disableSensitivityBanner=true&amp;storytellingChangeViewModeShortcutKeys=true&quot;"/>
     <we:property name="initialStateBookmark" value="&quot;H4sIAAAAAAAAA+1a32/bNhD+Vwa99MUYJFE/++Y47hC0sTM7K1YMgXEkj45aWTIoOokX5H/fibLXpHHsrIs7a+2jjqfj3X3fnXmUbx2ZVfMclgOYofPaOSrLTzPQn37ynI5TrGTD4dvT7ujtZNA97ZO4nJusLCrn9a1jQE/RvM+qBeS1BRL+cdFxIM/PYFo/Kcgr7Dhz1FVZQJ79iY0yLRm9wLuOgzfzvNRQmxwbMFibvSJ1eqa9vZ8Z7QjCZFc4RmEaqZKRx91IAIauDDFA5AmpVY2C9WyjSm3abt8rCwNZQdvUMi4g9JSK4pAJKUMRB35kbWS5Wass+zdzTdFRzMt5nZWuvIJCoHRsCBqrxuNbpzudapyCWT32Hyz2ynwx2yAflwstcITKLhUmM0va46Sg/QtrCvIjjdeoM8rqHaXtTJeUVKv162/dwfnJ+Qcrf7MoVlly68fL8rqnkdIqa0Hnb+97JJqWOhOQPwpgHz4ejbqD47Hz2KULklRZMc1XxPiM0Xnj6TVpaqJR3rsEbWr68Y+Ec40KvVpqifpoaYE5zvSaIX7nC98PCJS7izWhSf3jPcquMGmC2SsIF3f1SsqZKzhxPVYKw4jHjIdfT/t9OPyh3x1tIk3nAKvwbDR8c3K+uwZ3El5Y59rF9qeC/++4vqZOQ/Uk4CyhLi9c3xWRSt1A+C3q8M/l1jPqYu+97vArtTccv0SdVgIMbbexUDdy/ndLroMhD5Xm3qvwHjOaQlS+ChiTqRczwFQpn7u8RYX4/KPW7jYPWramv287zdj+6svYC8Gjs3aURsAjGbXpBP1yv91tAvXpH+1axJkXMZGkvhcmkYzTII3jFkF6b+D4HJz/f4f0qagbSKMA3TT2GTIUiklgUiQtgnTcfdcfT0b9s+8N1S2BN8CGPOHUgn3Xx4SnLo+46+4Etj1XAFWeCdQP4HJmqKf2rkiCARvWvNmq3rleL6VdRhv1rfMuIx8b2+8hX9RmXx3TG7K8Ll6RU+tUbjy52TeqbzeXi9QPpApRMD/lCIE6PDRH/V9OhoMfaG7JTIMmYSk8CNHDNAo9SFH49pZla44M3hhe3jzsULU1e8riitgBARMq8qOA7bSWzYCy+8iWT9SKBYtS4bkuKhUnaZvO4v98KG5Px2vppefhXQN90VpVkNCAAoFMYl8mqRszAS2i/GlZmMtJqSbmEidLBP29nYSekYDVQOq6CePIgiDxI5+FNJj+i9727UI5/NuzF5uV86zAH+3t5Um0uvEOwVXocRGEgnEhMYyDFnW6r/mmeRCfpnbSXpbFwrSL94f4LfP+9x1L+E3TRLkw1RwEnkGBG6YKYgkUssZt62RR/1HBsXsQkBnPd00ia/2Vc38BGRtw7mMhAAA=&quot;"/>
     <we:property name="isFiltersActionButtonVisible" value="true"/>
-    <we:property name="isFooterCollapsed" value="true"/>
     <we:property name="isVisualContainerHeaderHidden" value="false"/>
     <we:property name="pageDisplayName" value="&quot;International Breweries  Dashboard&quot;"/>
     <we:property name="pageName" value="&quot;fd61b06cae50d5e4eeb8&quot;"/>
-    <we:property name="reportEmbeddedTime" value="&quot;2025-02-28T14:19:25.615Z&quot;"/>
-    <we:property name="reportName" value="&quot;Int&quot;"/>
+    <we:property name="reportEmbeddedTime" value="&quot;2025-03-30T23:42:35.864Z&quot;"/>
+    <we:property name="reportName" value="&quot;International_breweries&quot;"/>
     <we:property name="reportState" value="&quot;CONNECTED&quot;"/>
-    <we:property name="reportUrl" value="&quot;/groups/me/reports/5abd6940-4195-4c01-bea5-18c9d38016a8/fd61b06cae50d5e4eeb8?bookmarkGuid=31b40be7-08be-46d9-960d-fa3cbd95ea74&amp;bookmarkUsage=1&amp;ctid=bd697c1b-c481-479c-841e-c618542675c3&amp;fromEntryPoint=export&quot;"/>
+    <we:property name="reportUrl" value="&quot;/groups/me/reports/5c97d12c-be94-4c8f-908f-fee5fa6ed713/fd61b06cae50d5e4eeb8?bookmarkGuid=17637ab4-323d-417a-b2eb-b17b72bcd6b8&amp;bookmarkUsage=1&amp;ctid=bd697c1b-c481-479c-841e-c618542675c3&amp;fromEntryPoint=export&quot;"/>
   </we:properties>
   <we:bindings/>
   <we:snapshot xmlns:r="http://schemas.openxmlformats.org/officeDocument/2006/relationships"/>
@@ -4787,12 +4786,12 @@
     <we:property name="Microsoft.Office.CampaignId" value="&quot;none&quot;"/>
     <we:property name="artifactViewState" value="&quot;live&quot;"/>
     <we:property name="backgroundColor" value="&quot;#FFFFFF&quot;"/>
-    <we:property name="bookmark" value="&quot;H4sIAAAAAAAAA81WTW/iMBD9KytfuESrhIaPcmspSGirtoJuV6uKw5BMgluTRLYpZVH++47tpIWWrtqV6O4FJePx+M2b5xc2LOaqELC+gAWyHjvN8/sFyPsvAfNY5mJ+EkHU6kZhp9OdIQbBLARazQvN80yx3oZpkCnqG66WIEwhCt5OPQZCXEFq3hIQCj1WoFR5BoL/QpdMS1ousfQYPhYil2BKTjRoNGUfKJ3eCULwNTCAINL8AScYaRfuhJ1uN242I8Sk3YbIh3hGacolWGh7U0xte34/zzTwjM4xseNueBR2/CRM2gDgQxg0fRNPuNBVymw9eCwktUdNrwvDTp/AprnkEQhm25CoHOoN6+diubBPg534JF/KCMeY2KVMc7023EuE+zhfZawkQq5kTnTtWZjnqz4FNMas55dTiiiepaJi9Lm3a4dPCR6hNPOa3REvtosF0rzMQ4rUu9lE/RTuQI7quefdp5t6Hk2PDWW+sNsq4Rje93TiMQeDgHrsxxwl2k3Ee8x1xcboBUOqSnkHd+7FHv8WZ1+GHEWsaJ0Q3IBYWnXSAedcu943LkybGo3GKKNoZnUIgoqsUBIjjcZt//L7xfV4NJhMG6bWtKSfsrRVFYpakq94VJqkoSd2QhObZ6JoRbQXg7kPrCxd+Vry1Njdlqif2jiIxIyk6MbPMR7a0Z85hxhpXLgzeWw7i2j3KHY6XxQguapVX79945kRqcfOMdGHuBDPw/XYmKdz/Qap7x9saUrteuJTAnMjaUVx3D469oNW8wiOW91OGM0+0Sb2N/KKovHJxdlkj2F4T5BO4gfIIoq+xHOSphJTqO/n4OBgr8aXw9G1jQ6XWXWV/D9h/2w6tzTwcQteUaakT6Doz0HqHSumrbmMUZ6urVjOuKydhDx28H9OxVjeXluqhrL+C2P6+BQM68W/PN/b8qfebbYUgkI/60eDDiQZSG0JO+Bq/z/IHwQyXXy0tiswS/Wc9QL3qTKLW9Iry98f8qQ8/gkAAA==&quot;"/>
+    <we:property name="bookmark" value="&quot;H4sIAAAAAAAAA81WTW8aMRD9K5UvXFbVQghft0BAQo2SCNJUVcTB2LOLE2OvvCaERvvfO7Z3SaCkSg6kPaxkj8czb2bejPeZcJFnkm4u6RJIj/S1flhS8/ClTiKigiyBFuskXRY3Y9ZpzxsUujGe6swKrXLSeyaWmhTsrchXVDpDKLybRYRKeU1Tt0uozCEiGZhcKyrFLwjKeGTNCoqIwFMmtaHO5NRSC87sI6rjHiHUv9YdIMqseIQpMBvE7Wa70+GNBgNIWi3KYsrnqJYHBQ/toIqz7f0PtLJUKPTjZKeM89ZJN66fNk5o97TTbjKvmwhpS5X5ZviUGQwPg95kLjsDBJtqIxiVxIdhIA+on8lAy9XSr4Y78qleGQYTSPyRssJu0NJYoRflU0Bl38AajMDkFZida6Mxd16rPzm7PJ966UKvBwbQPye9uIi2kM74I1UMpft4ztLUQEptuR0eHez15Go0vvHS0UqVZYv/hv2z0zm4+n55MxkPD2V0hpJcqFSWbH3hzU0Au0ZNg9yWgwU11vXE/B6555iCV7XhYPobT5ZzYSrWNqI9+P9NVYpZ1WKofP+qicqihFCOXQWX9exf+o8I6tEHrtdo906tpETRz2rp0FGDQ64aCTvgwE+Hj4J88bff7DsHQnF4wkpFRIJK7YL06pgtd9LtNE+a7ThpJi1KaUyb9Ub8iZPrnfg/2F25FAzMTleRJeBL4xYp4NR2lzCeLDh0dd3GvLu6rV4SbL6R0Ut/rXzy3ItxIJKIBBixI8SPBRgo2ae4qFp1vJeh/P0EDRvv/q2cfRkJkDwPlLylcuXfVXRwIWyI/TmI8VKtVjvM9FrtbkvuWc3Zcoxxn7Oag6zG0h95zC1Sw059haZez0krgh/A4F5yUhTB/BuTZBvGUSjmKMUoWwAf+dKfh3+bsYVl8Cm4j4zh7TEPPF9iN4u8Yn21+4a95jvtAhJ7jIZ4KW5EJiJd2DeS+v7C+kGw+zf3aqzNSoVXL1RR/AbY/Y+D/gkAAA==&quot;"/>
     <we:property name="creatorSessionId" value="&quot;8acbc9a4-c7b8-409b-a1ae-10db13e79a6e&quot;"/>
     <we:property name="creatorTenantId" value="&quot;bd697c1b-c481-479c-841e-c618542675c3&quot;"/>
     <we:property name="creatorUserId" value="&quot;10032003E0B78333&quot;"/>
     <we:property name="datasetId" value="&quot;9fcd6de3-96fb-48b3-84d8-6ee1d6b00003&quot;"/>
-    <we:property name="embedUrl" value="&quot;/reportEmbed?reportId=7a08fe6f-c5c4-451e-8081-a2ccd86a60d4&amp;config=eyJjbHVzdGVyVXJsIjoiaHR0cHM6Ly9XQUJJLVVTLUVBU1QyLUMtUFJJTUFSWS1yZWRpcmVjdC5hbmFseXNpcy53aW5kb3dzLm5ldCIsImVtYmVkRmVhdHVyZXMiOnsidXNhZ2VNZXRyaWNzVk5leHQiOnRydWV9fQ%3D%3D&amp;disableSensitivityBanner=true&quot;"/>
+    <we:property name="embedUrl" value="&quot;/reportEmbed?reportId=7a08fe6f-c5c4-451e-8081-a2ccd86a60d4&amp;config=eyJjbHVzdGVyVXJsIjoiaHR0cHM6Ly9XQUJJLVVTLUVBU1QyLUMtUFJJTUFSWS1yZWRpcmVjdC5hbmFseXNpcy53aW5kb3dzLm5ldCIsImVtYmVkRmVhdHVyZXMiOnsidXNhZ2VNZXRyaWNzVk5leHQiOnRydWV9fQ%3D%3D&amp;disableSensitivityBanner=true&amp;storytellingChangeViewModeShortcutKeys=true&quot;"/>
     <we:property name="initialStateBookmark" value="&quot;H4sIAAAAAAAAA81WUW/aMBD+K5VfeImmQClQ3oCChNoBgq7TVKHJjY/g1tiRY0oZyn/f2U5oYXSiD3R7iGSfz3ff3X13zoYwniaCrgd0AaRJ2ko9Lah+OiuTgMhcNhxef22Nr38OWl+7KFaJ4UqmpLkhhuoYzB1Pl1RYCyi8nwaECjGisd3NqEghIAnoVEkq+C/wynhk9BKygMBLIpSm1uTEUAPW7DOq4x59l7+ULRIaGf4ME4iMF9er9UaDVSoRwKxWo1FI2QOqpV7BQTuoYm07/x0lDeUS/VjZRcRY7fwyLF9UzunlRaNejZzujAuTqzysuy+JxvAw6HVi09JBsLHSPKKCuDA0pB71hnSUWC7cqrsjn6iljmAMM3ckDTdrtNSX6EW6FFDR1rACzTF5GWZnpBXmzmm1x63B1cRJ52rV0YD+GWmGWbCF1GLPVEYo3cfTimMNMTX5tntysKPxsNe/ddLeUuZlC/+G/bPT2Rl+G9yO+91DGZ2iJOUyFjlbX3lz68GuUFMjt0VnTrWxPfHwiNyzTMGrSjPQ7bUjyxXXBWsrwR78/6Yq2bRoMVR+fNNEeVF8KKeugs168i/9BwT16BNTK7R7L5dCoOhHsbToqMYhV4yEHXDgpsNHQb7622/2nQMuGbxgpQIiQMZmTpplzJY9uWxUz6v1cFad1SilIa2WK+EnTq4j8X+wu1LBI9A7XUUWgC+NXcSAU9tewngS79DWdRvz7uqueEmw+XpaLdy1/K2zL8aBSALiYYSWEN/noCFnn2S8aNX+XobS4wnqN879ezk763EQLPWUvKNi6d5VdHDDjY9948V4qVQqHWZ6qXS/Jfe0ZG1ZxtjPWk1BFGPpjzymBqlhJq5CE6dnpQXBD2CwLznJMm/+nUmyDeMkFLOUimg0B9Zzpb/yPzV9AwvvkzMXWYS3+8zzfIHdzNOC9cXuGnvNddoNzMwpGuK1uAEZ83hu3knq8YV1g2D3N+7NWJvmCod6SS1NmtAIRlTCASJgySlOHnZk+QPbxfxBwEfokmW/AeNMuJ6DCgAA&quot;"/>
     <we:property name="isFiltersActionButtonVisible" value="true"/>
     <we:property name="isFooterCollapsed" value="true"/>
@@ -4822,7 +4821,7 @@
     <we:property name="creatorTenantId" value="&quot;bd697c1b-c481-479c-841e-c618542675c3&quot;"/>
     <we:property name="creatorUserId" value="&quot;10032003E0B78333&quot;"/>
     <we:property name="datasetId" value="&quot;9fcd6de3-96fb-48b3-84d8-6ee1d6b00003&quot;"/>
-    <we:property name="embedUrl" value="&quot;/reportEmbed?reportId=7a08fe6f-c5c4-451e-8081-a2ccd86a60d4&amp;config=eyJjbHVzdGVyVXJsIjoiaHR0cHM6Ly9XQUJJLVVTLUVBU1QyLUMtUFJJTUFSWS1yZWRpcmVjdC5hbmFseXNpcy53aW5kb3dzLm5ldCIsImVtYmVkRmVhdHVyZXMiOnsidXNhZ2VNZXRyaWNzVk5leHQiOnRydWV9fQ%3D%3D&amp;disableSensitivityBanner=true&quot;"/>
+    <we:property name="embedUrl" value="&quot;/reportEmbed?reportId=7a08fe6f-c5c4-451e-8081-a2ccd86a60d4&amp;config=eyJjbHVzdGVyVXJsIjoiaHR0cHM6Ly9XQUJJLVVTLUVBU1QyLUMtUFJJTUFSWS1yZWRpcmVjdC5hbmFseXNpcy53aW5kb3dzLm5ldCIsImVtYmVkRmVhdHVyZXMiOnsidXNhZ2VNZXRyaWNzVk5leHQiOnRydWV9fQ%3D%3D&amp;disableSensitivityBanner=true&amp;storytellingChangeViewModeShortcutKeys=true&quot;"/>
     <we:property name="initialStateBookmark" value="&quot;H4sIAAAAAAAAA81UUW+bMBD+K5Of0QSkAZK3JEulqksTJVVfpii6wEHcOjYyJi2L+O87GyJ1W9XtZVN5wf7u4/x9d2fOLONVKaC5gyOyMZsq9XQE/fQpYB6TPbZc3i4m69vd3WQxJ1iVhitZsfGZGdAFmgde1SBsBgK/bT0GQqygsLscRIUeK1FXSoLg37EjU8joGluP4UsplAabcmPAoE17Ijrt6ezg84BOhNTwE24wNR26T8LAzwd+7O8xucJBFIRDolUdwSl7k0J4zoWh7I7SzF9KTYrPF6dB6kfhKLnKwziIkiAdBpBRXtOUNjrJTiBTtAiJ1lh1Gs9spkR9dKv5T/hG1TrFNeYuJA03DaW5kSRAOsMgphqfUXMqVUu1WGlFlXKshZLmsFP5zhxw1yBoRzio55lGqlLGxkG7JeTkyjkjNnDZG/OzOEzDfBSPRlE0yGEYJ+94/5ju/Nb7s7RJUWgswPTb+T/XvVovr2/uHXpdy34c/d+1285UXBaiH3c31G5131kS1KzZAbSx92n/SINr20JfKZ2hnjauM1+4vox86P3i4sNYb7eX+0nkx1c3cEbFKJTurPyvIdq27nldVHZE+knZhapNVUKKK5DoVJVdMpubwjRbIDPbQLfW9v2Vk5Kufw8gats6+99i7gzqKN8L/Et+L+4HJM+GP3IFAAA=&quot;"/>
     <we:property name="isFiltersActionButtonVisible" value="true"/>
     <we:property name="isFooterCollapsed" value="true"/>
@@ -4840,12 +4839,12 @@
 </file>
 
 <file path=customXml/item1.xml><?xml version="1.0" encoding="utf-8"?>
-<p:properties xmlns:p="http://schemas.microsoft.com/office/2006/metadata/properties" xmlns:xsi="http://www.w3.org/2001/XMLSchema-instance" xmlns:pc="http://schemas.microsoft.com/office/infopath/2007/PartnerControls">
-  <documentManagement>
-    <Document_x0020_Purpose xmlns="f577acbf-5b0b-4b4f-9948-268e97f8d3a4">Informational</Document_x0020_Purpose>
-    <Initiatives xmlns="f577acbf-5b0b-4b4f-9948-268e97f8d3a4"/>
-  </documentManagement>
-</p:properties>
+<?mso-contentType ?>
+<FormTemplates xmlns="http://schemas.microsoft.com/sharepoint/v3/contenttype/forms">
+  <Display>DocumentLibraryForm</Display>
+  <Edit>DocumentLibraryForm</Edit>
+  <New>DocumentLibraryForm</New>
+</FormTemplates>
 </file>
 
 <file path=customXml/item2.xml><?xml version="1.0" encoding="utf-8"?>
@@ -5105,27 +5104,18 @@
 </file>
 
 <file path=customXml/item3.xml><?xml version="1.0" encoding="utf-8"?>
-<?mso-contentType ?>
-<FormTemplates xmlns="http://schemas.microsoft.com/sharepoint/v3/contenttype/forms">
-  <Display>DocumentLibraryForm</Display>
-  <Edit>DocumentLibraryForm</Edit>
-  <New>DocumentLibraryForm</New>
-</FormTemplates>
+<p:properties xmlns:p="http://schemas.microsoft.com/office/2006/metadata/properties" xmlns:xsi="http://www.w3.org/2001/XMLSchema-instance" xmlns:pc="http://schemas.microsoft.com/office/infopath/2007/PartnerControls">
+  <documentManagement>
+    <Document_x0020_Purpose xmlns="f577acbf-5b0b-4b4f-9948-268e97f8d3a4">Informational</Document_x0020_Purpose>
+    <Initiatives xmlns="f577acbf-5b0b-4b4f-9948-268e97f8d3a4"/>
+  </documentManagement>
+</p:properties>
 </file>
 
 <file path=customXml/itemProps1.xml><?xml version="1.0" encoding="utf-8"?>
-<ds:datastoreItem xmlns:ds="http://schemas.openxmlformats.org/officeDocument/2006/customXml" ds:itemID="{617AB1FA-2F28-4684-9230-02ACEB6C0B0A}">
+<ds:datastoreItem xmlns:ds="http://schemas.openxmlformats.org/officeDocument/2006/customXml" ds:itemID="{E21AFCC0-734A-4A90-A597-A1CB34860DCD}">
   <ds:schemaRefs>
-    <ds:schemaRef ds:uri="http://purl.org/dc/terms/"/>
-    <ds:schemaRef ds:uri="http://purl.org/dc/dcmitype/"/>
-    <ds:schemaRef ds:uri="b1e4d6ee-9f6f-43f8-a618-24f3d84da28f"/>
-    <ds:schemaRef ds:uri="f577acbf-5b0b-4b4f-9948-268e97f8d3a4"/>
-    <ds:schemaRef ds:uri="http://schemas.microsoft.com/office/2006/documentManagement/types"/>
-    <ds:schemaRef ds:uri="http://schemas.openxmlformats.org/package/2006/metadata/core-properties"/>
-    <ds:schemaRef ds:uri="http://schemas.microsoft.com/office/infopath/2007/PartnerControls"/>
-    <ds:schemaRef ds:uri="http://schemas.microsoft.com/office/2006/metadata/properties"/>
-    <ds:schemaRef ds:uri="http://www.w3.org/XML/1998/namespace"/>
-    <ds:schemaRef ds:uri="http://purl.org/dc/elements/1.1/"/>
+    <ds:schemaRef ds:uri="http://schemas.microsoft.com/sharepoint/v3/contenttype/forms"/>
   </ds:schemaRefs>
 </ds:datastoreItem>
 </file>
@@ -5150,9 +5140,18 @@
 </file>
 
 <file path=customXml/itemProps3.xml><?xml version="1.0" encoding="utf-8"?>
-<ds:datastoreItem xmlns:ds="http://schemas.openxmlformats.org/officeDocument/2006/customXml" ds:itemID="{E21AFCC0-734A-4A90-A597-A1CB34860DCD}">
+<ds:datastoreItem xmlns:ds="http://schemas.openxmlformats.org/officeDocument/2006/customXml" ds:itemID="{617AB1FA-2F28-4684-9230-02ACEB6C0B0A}">
   <ds:schemaRefs>
-    <ds:schemaRef ds:uri="http://schemas.microsoft.com/sharepoint/v3/contenttype/forms"/>
+    <ds:schemaRef ds:uri="http://purl.org/dc/terms/"/>
+    <ds:schemaRef ds:uri="http://purl.org/dc/dcmitype/"/>
+    <ds:schemaRef ds:uri="b1e4d6ee-9f6f-43f8-a618-24f3d84da28f"/>
+    <ds:schemaRef ds:uri="f577acbf-5b0b-4b4f-9948-268e97f8d3a4"/>
+    <ds:schemaRef ds:uri="http://schemas.microsoft.com/office/2006/documentManagement/types"/>
+    <ds:schemaRef ds:uri="http://schemas.openxmlformats.org/package/2006/metadata/core-properties"/>
+    <ds:schemaRef ds:uri="http://schemas.microsoft.com/office/infopath/2007/PartnerControls"/>
+    <ds:schemaRef ds:uri="http://schemas.microsoft.com/office/2006/metadata/properties"/>
+    <ds:schemaRef ds:uri="http://www.w3.org/XML/1998/namespace"/>
+    <ds:schemaRef ds:uri="http://purl.org/dc/elements/1.1/"/>
   </ds:schemaRefs>
 </ds:datastoreItem>
 </file>